--- a/Apresentação ppt/Apresentacao_Bimbo_estatico.pptx
+++ b/Apresentação ppt/Apresentacao_Bimbo_estatico.pptx
@@ -4019,6 +4019,36 @@
           </a:p>
         </p:txBody>
       </p:sp>
+      <p:pic>
+        <p:nvPicPr>
+          <p:cNvPr id="6" name="Imagem 5">
+            <a:extLst>
+              <a:ext uri="{FF2B5EF4-FFF2-40B4-BE49-F238E27FC236}">
+                <a16:creationId xmlns:a16="http://schemas.microsoft.com/office/drawing/2014/main" id="{1CB8B996-A421-957D-A417-533B3F5297F2}"/>
+              </a:ext>
+            </a:extLst>
+          </p:cNvPr>
+          <p:cNvPicPr>
+            <a:picLocks noChangeAspect="1"/>
+          </p:cNvPicPr>
+          <p:nvPr/>
+        </p:nvPicPr>
+        <p:blipFill>
+          <a:blip r:embed="rId3"/>
+          <a:stretch>
+            <a:fillRect/>
+          </a:stretch>
+        </p:blipFill>
+        <p:spPr>
+          <a:xfrm>
+            <a:off x="853440" y="650390"/>
+            <a:ext cx="10745911" cy="6031624"/>
+          </a:xfrm>
+          <a:prstGeom prst="rect">
+            <a:avLst/>
+          </a:prstGeom>
+        </p:spPr>
+      </p:pic>
       <p:sp>
         <p:nvSpPr>
           <p:cNvPr id="48" name="Text 1">
@@ -4064,36 +4094,6 @@
           </a:p>
         </p:txBody>
       </p:sp>
-      <p:pic>
-        <p:nvPicPr>
-          <p:cNvPr id="50" name="Imagem 49">
-            <a:extLst>
-              <a:ext uri="{FF2B5EF4-FFF2-40B4-BE49-F238E27FC236}">
-                <a16:creationId xmlns:a16="http://schemas.microsoft.com/office/drawing/2014/main" id="{E64033E0-916D-5621-612C-EDEF79BD3010}"/>
-              </a:ext>
-            </a:extLst>
-          </p:cNvPr>
-          <p:cNvPicPr>
-            <a:picLocks noChangeAspect="1"/>
-          </p:cNvPicPr>
-          <p:nvPr/>
-        </p:nvPicPr>
-        <p:blipFill>
-          <a:blip r:embed="rId3"/>
-          <a:stretch>
-            <a:fillRect/>
-          </a:stretch>
-        </p:blipFill>
-        <p:spPr>
-          <a:xfrm>
-            <a:off x="853440" y="688756"/>
-            <a:ext cx="10745911" cy="6047324"/>
-          </a:xfrm>
-          <a:prstGeom prst="rect">
-            <a:avLst/>
-          </a:prstGeom>
-        </p:spPr>
-      </p:pic>
     </p:spTree>
   </p:cSld>
   <p:clrMapOvr>
@@ -4127,36 +4127,6 @@
           <a:chExt cx="0" cy="0"/>
         </a:xfrm>
       </p:grpSpPr>
-      <p:pic>
-        <p:nvPicPr>
-          <p:cNvPr id="44" name="Imagem 43">
-            <a:extLst>
-              <a:ext uri="{FF2B5EF4-FFF2-40B4-BE49-F238E27FC236}">
-                <a16:creationId xmlns:a16="http://schemas.microsoft.com/office/drawing/2014/main" id="{24937EA0-A404-989D-629A-093B9C3E351F}"/>
-              </a:ext>
-            </a:extLst>
-          </p:cNvPr>
-          <p:cNvPicPr>
-            <a:picLocks noChangeAspect="1"/>
-          </p:cNvPicPr>
-          <p:nvPr/>
-        </p:nvPicPr>
-        <p:blipFill>
-          <a:blip r:embed="rId3"/>
-          <a:stretch>
-            <a:fillRect/>
-          </a:stretch>
-        </p:blipFill>
-        <p:spPr>
-          <a:xfrm>
-            <a:off x="896595" y="706667"/>
-            <a:ext cx="10702756" cy="6029413"/>
-          </a:xfrm>
-          <a:prstGeom prst="rect">
-            <a:avLst/>
-          </a:prstGeom>
-        </p:spPr>
-      </p:pic>
       <p:sp>
         <p:nvSpPr>
           <p:cNvPr id="2" name="Shape 0"/>
@@ -4312,6 +4282,36 @@
           </a:p>
         </p:txBody>
       </p:sp>
+      <p:pic>
+        <p:nvPicPr>
+          <p:cNvPr id="7" name="Imagem 6">
+            <a:extLst>
+              <a:ext uri="{FF2B5EF4-FFF2-40B4-BE49-F238E27FC236}">
+                <a16:creationId xmlns:a16="http://schemas.microsoft.com/office/drawing/2014/main" id="{19734E52-E4D9-A5E9-DE80-A35F39E3DD3E}"/>
+              </a:ext>
+            </a:extLst>
+          </p:cNvPr>
+          <p:cNvPicPr>
+            <a:picLocks noChangeAspect="1"/>
+          </p:cNvPicPr>
+          <p:nvPr/>
+        </p:nvPicPr>
+        <p:blipFill>
+          <a:blip r:embed="rId3"/>
+          <a:stretch>
+            <a:fillRect/>
+          </a:stretch>
+        </p:blipFill>
+        <p:spPr>
+          <a:xfrm>
+            <a:off x="853440" y="684882"/>
+            <a:ext cx="10668000" cy="5992928"/>
+          </a:xfrm>
+          <a:prstGeom prst="rect">
+            <a:avLst/>
+          </a:prstGeom>
+        </p:spPr>
+      </p:pic>
     </p:spTree>
   </p:cSld>
   <p:clrMapOvr>
@@ -4351,36 +4351,6 @@
           <a:chExt cx="0" cy="0"/>
         </a:xfrm>
       </p:grpSpPr>
-      <p:pic>
-        <p:nvPicPr>
-          <p:cNvPr id="24" name="Imagem 23">
-            <a:extLst>
-              <a:ext uri="{FF2B5EF4-FFF2-40B4-BE49-F238E27FC236}">
-                <a16:creationId xmlns:a16="http://schemas.microsoft.com/office/drawing/2014/main" id="{BF74E0A6-909A-A1B9-9353-647285FCE0D7}"/>
-              </a:ext>
-            </a:extLst>
-          </p:cNvPr>
-          <p:cNvPicPr>
-            <a:picLocks noChangeAspect="1"/>
-          </p:cNvPicPr>
-          <p:nvPr/>
-        </p:nvPicPr>
-        <p:blipFill>
-          <a:blip r:embed="rId3"/>
-          <a:stretch>
-            <a:fillRect/>
-          </a:stretch>
-        </p:blipFill>
-        <p:spPr>
-          <a:xfrm>
-            <a:off x="896595" y="716237"/>
-            <a:ext cx="10702756" cy="6019843"/>
-          </a:xfrm>
-          <a:prstGeom prst="rect">
-            <a:avLst/>
-          </a:prstGeom>
-        </p:spPr>
-      </p:pic>
       <p:sp>
         <p:nvSpPr>
           <p:cNvPr id="2" name="Shape 0">
@@ -4509,6 +4479,36 @@
           </a:p>
         </p:txBody>
       </p:sp>
+      <p:pic>
+        <p:nvPicPr>
+          <p:cNvPr id="6" name="Imagem 5">
+            <a:extLst>
+              <a:ext uri="{FF2B5EF4-FFF2-40B4-BE49-F238E27FC236}">
+                <a16:creationId xmlns:a16="http://schemas.microsoft.com/office/drawing/2014/main" id="{CE8BD881-BCEA-961E-4B86-BA091B8FFC5B}"/>
+              </a:ext>
+            </a:extLst>
+          </p:cNvPr>
+          <p:cNvPicPr>
+            <a:picLocks noChangeAspect="1"/>
+          </p:cNvPicPr>
+          <p:nvPr/>
+        </p:nvPicPr>
+        <p:blipFill>
+          <a:blip r:embed="rId3"/>
+          <a:stretch>
+            <a:fillRect/>
+          </a:stretch>
+        </p:blipFill>
+        <p:spPr>
+          <a:xfrm>
+            <a:off x="910148" y="745424"/>
+            <a:ext cx="10590236" cy="5964783"/>
+          </a:xfrm>
+          <a:prstGeom prst="rect">
+            <a:avLst/>
+          </a:prstGeom>
+        </p:spPr>
+      </p:pic>
     </p:spTree>
     <p:extLst>
       <p:ext uri="{BB962C8B-B14F-4D97-AF65-F5344CB8AC3E}">
